--- a/Design/ConceptualDesign/課題7/概念設計.pptx
+++ b/Design/ConceptualDesign/課題7/概念設計.pptx
@@ -779,7 +779,7 @@
           <a:p>
             <a:fld id="{0E02A643-9BB0-4E02-80B2-2C0A5E5D738E}" type="datetimeFigureOut">
               <a:rPr kumimoji="1" lang="ja-JP" altLang="en-US" smtClean="0"/>
-              <a:t>2026/3/29</a:t>
+              <a:t>2026/4/4</a:t>
             </a:fld>
             <a:endParaRPr kumimoji="1" lang="ja-JP" altLang="en-US"/>
           </a:p>
@@ -979,7 +979,7 @@
           <a:p>
             <a:fld id="{0E02A643-9BB0-4E02-80B2-2C0A5E5D738E}" type="datetimeFigureOut">
               <a:rPr kumimoji="1" lang="ja-JP" altLang="en-US" smtClean="0"/>
-              <a:t>2026/3/29</a:t>
+              <a:t>2026/4/4</a:t>
             </a:fld>
             <a:endParaRPr kumimoji="1" lang="ja-JP" altLang="en-US"/>
           </a:p>
@@ -1189,7 +1189,7 @@
           <a:p>
             <a:fld id="{0E02A643-9BB0-4E02-80B2-2C0A5E5D738E}" type="datetimeFigureOut">
               <a:rPr kumimoji="1" lang="ja-JP" altLang="en-US" smtClean="0"/>
-              <a:t>2026/3/29</a:t>
+              <a:t>2026/4/4</a:t>
             </a:fld>
             <a:endParaRPr kumimoji="1" lang="ja-JP" altLang="en-US"/>
           </a:p>
@@ -1389,7 +1389,7 @@
           <a:p>
             <a:fld id="{0E02A643-9BB0-4E02-80B2-2C0A5E5D738E}" type="datetimeFigureOut">
               <a:rPr kumimoji="1" lang="ja-JP" altLang="en-US" smtClean="0"/>
-              <a:t>2026/3/29</a:t>
+              <a:t>2026/4/4</a:t>
             </a:fld>
             <a:endParaRPr kumimoji="1" lang="ja-JP" altLang="en-US"/>
           </a:p>
@@ -1634,7 +1634,7 @@
           <a:p>
             <a:fld id="{0E02A643-9BB0-4E02-80B2-2C0A5E5D738E}" type="datetimeFigureOut">
               <a:rPr kumimoji="1" lang="ja-JP" altLang="en-US" smtClean="0"/>
-              <a:t>2026/3/29</a:t>
+              <a:t>2026/4/4</a:t>
             </a:fld>
             <a:endParaRPr kumimoji="1" lang="ja-JP" altLang="en-US"/>
           </a:p>
@@ -1927,7 +1927,7 @@
           <a:p>
             <a:fld id="{0E02A643-9BB0-4E02-80B2-2C0A5E5D738E}" type="datetimeFigureOut">
               <a:rPr kumimoji="1" lang="ja-JP" altLang="en-US" smtClean="0"/>
-              <a:t>2026/3/29</a:t>
+              <a:t>2026/4/4</a:t>
             </a:fld>
             <a:endParaRPr kumimoji="1" lang="ja-JP" altLang="en-US"/>
           </a:p>
@@ -2355,7 +2355,7 @@
           <a:p>
             <a:fld id="{0E02A643-9BB0-4E02-80B2-2C0A5E5D738E}" type="datetimeFigureOut">
               <a:rPr kumimoji="1" lang="ja-JP" altLang="en-US" smtClean="0"/>
-              <a:t>2026/3/29</a:t>
+              <a:t>2026/4/4</a:t>
             </a:fld>
             <a:endParaRPr kumimoji="1" lang="ja-JP" altLang="en-US"/>
           </a:p>
@@ -2472,7 +2472,7 @@
           <a:p>
             <a:fld id="{0E02A643-9BB0-4E02-80B2-2C0A5E5D738E}" type="datetimeFigureOut">
               <a:rPr kumimoji="1" lang="ja-JP" altLang="en-US" smtClean="0"/>
-              <a:t>2026/3/29</a:t>
+              <a:t>2026/4/4</a:t>
             </a:fld>
             <a:endParaRPr kumimoji="1" lang="ja-JP" altLang="en-US"/>
           </a:p>
@@ -2567,7 +2567,7 @@
           <a:p>
             <a:fld id="{0E02A643-9BB0-4E02-80B2-2C0A5E5D738E}" type="datetimeFigureOut">
               <a:rPr kumimoji="1" lang="ja-JP" altLang="en-US" smtClean="0"/>
-              <a:t>2026/3/29</a:t>
+              <a:t>2026/4/4</a:t>
             </a:fld>
             <a:endParaRPr kumimoji="1" lang="ja-JP" altLang="en-US"/>
           </a:p>
@@ -2874,7 +2874,7 @@
           <a:p>
             <a:fld id="{0E02A643-9BB0-4E02-80B2-2C0A5E5D738E}" type="datetimeFigureOut">
               <a:rPr kumimoji="1" lang="ja-JP" altLang="en-US" smtClean="0"/>
-              <a:t>2026/3/29</a:t>
+              <a:t>2026/4/4</a:t>
             </a:fld>
             <a:endParaRPr kumimoji="1" lang="ja-JP" altLang="en-US"/>
           </a:p>
@@ -3126,7 +3126,7 @@
           <a:p>
             <a:fld id="{0E02A643-9BB0-4E02-80B2-2C0A5E5D738E}" type="datetimeFigureOut">
               <a:rPr kumimoji="1" lang="ja-JP" altLang="en-US" smtClean="0"/>
-              <a:t>2026/3/29</a:t>
+              <a:t>2026/4/4</a:t>
             </a:fld>
             <a:endParaRPr kumimoji="1" lang="ja-JP" altLang="en-US"/>
           </a:p>
@@ -3369,7 +3369,7 @@
           <a:p>
             <a:fld id="{0E02A643-9BB0-4E02-80B2-2C0A5E5D738E}" type="datetimeFigureOut">
               <a:rPr kumimoji="1" lang="ja-JP" altLang="en-US" smtClean="0"/>
-              <a:t>2026/3/29</a:t>
+              <a:t>2026/4/4</a:t>
             </a:fld>
             <a:endParaRPr kumimoji="1" lang="ja-JP" altLang="en-US"/>
           </a:p>
@@ -3880,7 +3880,7 @@
         </p:nvSpPr>
         <p:spPr>
           <a:xfrm>
-            <a:off x="2213473" y="5838253"/>
+            <a:off x="2021114" y="5702735"/>
             <a:ext cx="930384" cy="1030751"/>
           </a:xfrm>
           <a:prstGeom prst="ellipse">
@@ -4008,7 +4008,7 @@
         </p:nvSpPr>
         <p:spPr>
           <a:xfrm>
-            <a:off x="574893" y="1820459"/>
+            <a:off x="2337133" y="718145"/>
             <a:ext cx="930384" cy="1030751"/>
           </a:xfrm>
           <a:prstGeom prst="ellipse">
@@ -4289,8 +4289,8 @@
         </p:nvSpPr>
         <p:spPr>
           <a:xfrm>
-            <a:off x="8585944" y="1029667"/>
-            <a:ext cx="2661519" cy="5437960"/>
+            <a:off x="8585944" y="-103909"/>
+            <a:ext cx="3325651" cy="6571536"/>
           </a:xfrm>
           <a:prstGeom prst="ellipse">
             <a:avLst/>
@@ -4419,8 +4419,8 @@
         </p:nvCxnSpPr>
         <p:spPr>
           <a:xfrm flipV="1">
-            <a:off x="1505277" y="308338"/>
-            <a:ext cx="8488859" cy="2027497"/>
+            <a:off x="3267517" y="308338"/>
+            <a:ext cx="6726619" cy="925183"/>
           </a:xfrm>
           <a:prstGeom prst="line">
             <a:avLst/>
@@ -4460,7 +4460,7 @@
         <p:spPr>
           <a:xfrm>
             <a:off x="1160142" y="6154481"/>
-            <a:ext cx="1053331" cy="199148"/>
+            <a:ext cx="860972" cy="63630"/>
           </a:xfrm>
           <a:prstGeom prst="line">
             <a:avLst/>
@@ -4599,7 +4599,7 @@
         </p:nvSpPr>
         <p:spPr>
           <a:xfrm>
-            <a:off x="3707703" y="5187360"/>
+            <a:off x="3240340" y="5574471"/>
             <a:ext cx="930384" cy="1030751"/>
           </a:xfrm>
           <a:prstGeom prst="ellipse">
@@ -4662,9 +4662,9 @@
           <p:nvPr/>
         </p:nvCxnSpPr>
         <p:spPr>
-          <a:xfrm flipH="1">
-            <a:off x="3007605" y="5702736"/>
-            <a:ext cx="700098" cy="286467"/>
+          <a:xfrm flipH="1" flipV="1">
+            <a:off x="2815246" y="5853685"/>
+            <a:ext cx="425094" cy="236162"/>
           </a:xfrm>
           <a:prstGeom prst="line">
             <a:avLst/>
@@ -4990,7 +4990,7 @@
                   <a:schemeClr val="tx1"/>
                 </a:solidFill>
               </a:rPr>
-              <a:t>Calculatorβ1</a:t>
+              <a:t>CalcBeta1</a:t>
             </a:r>
             <a:endParaRPr kumimoji="1" lang="ja-JP" altLang="en-US" sz="1200" dirty="0">
               <a:solidFill>
@@ -5049,7 +5049,7 @@
                   <a:schemeClr val="tx1"/>
                 </a:solidFill>
               </a:rPr>
-              <a:t>Calculatorβ0</a:t>
+              <a:t>CalcBeta0</a:t>
             </a:r>
             <a:endParaRPr kumimoji="1" lang="ja-JP" altLang="en-US" dirty="0">
               <a:solidFill>
